--- a/OpenAI-MarcoBauer.pptx
+++ b/OpenAI-MarcoBauer.pptx
@@ -128,6 +128,61 @@
 
 <file path=ppt/changesInfos/changesInfo1.xml><?xml version="1.0" encoding="utf-8"?>
 <pc:chgInfo xmlns:a="http://schemas.openxmlformats.org/drawingml/2006/main" xmlns:r="http://schemas.openxmlformats.org/officeDocument/2006/relationships" xmlns:ac="http://schemas.microsoft.com/office/drawing/2013/main/command" xmlns:pc="http://schemas.microsoft.com/office/powerpoint/2013/main/command">
+  <pc:docChgLst>
+    <pc:chgData name="Marco Bauer - OSBR" userId="67df0eea-3fa5-445e-8ba4-a52bfbd70c4f" providerId="ADAL" clId="{D03E3FC4-E1EA-4DC7-B848-5BDFA8DE2D42}"/>
+    <pc:docChg chg="undo custSel modSld">
+      <pc:chgData name="Marco Bauer - OSBR" userId="67df0eea-3fa5-445e-8ba4-a52bfbd70c4f" providerId="ADAL" clId="{D03E3FC4-E1EA-4DC7-B848-5BDFA8DE2D42}" dt="2025-10-05T13:14:54.958" v="4" actId="1076"/>
+      <pc:docMkLst>
+        <pc:docMk/>
+      </pc:docMkLst>
+      <pc:sldChg chg="addSp delSp modSp mod">
+        <pc:chgData name="Marco Bauer - OSBR" userId="67df0eea-3fa5-445e-8ba4-a52bfbd70c4f" providerId="ADAL" clId="{D03E3FC4-E1EA-4DC7-B848-5BDFA8DE2D42}" dt="2025-10-05T13:14:54.958" v="4" actId="1076"/>
+        <pc:sldMkLst>
+          <pc:docMk/>
+          <pc:sldMk cId="1534718603" sldId="279"/>
+        </pc:sldMkLst>
+        <pc:picChg chg="add mod">
+          <ac:chgData name="Marco Bauer - OSBR" userId="67df0eea-3fa5-445e-8ba4-a52bfbd70c4f" providerId="ADAL" clId="{D03E3FC4-E1EA-4DC7-B848-5BDFA8DE2D42}" dt="2025-10-05T13:14:54.958" v="4" actId="1076"/>
+          <ac:picMkLst>
+            <pc:docMk/>
+            <pc:sldMk cId="1534718603" sldId="279"/>
+            <ac:picMk id="3" creationId="{89C33A75-C2D3-9FAA-D7A8-9D9C09B2B7A3}"/>
+          </ac:picMkLst>
+        </pc:picChg>
+        <pc:picChg chg="add del">
+          <ac:chgData name="Marco Bauer - OSBR" userId="67df0eea-3fa5-445e-8ba4-a52bfbd70c4f" providerId="ADAL" clId="{D03E3FC4-E1EA-4DC7-B848-5BDFA8DE2D42}" dt="2025-10-05T13:14:52.094" v="2" actId="478"/>
+          <ac:picMkLst>
+            <pc:docMk/>
+            <pc:sldMk cId="1534718603" sldId="279"/>
+            <ac:picMk id="6" creationId="{458D9D94-05E3-B95F-5EBF-D0B37EAFA458}"/>
+          </ac:picMkLst>
+        </pc:picChg>
+      </pc:sldChg>
+    </pc:docChg>
+  </pc:docChgLst>
+  <pc:docChgLst>
+    <pc:chgData name="Marco Bauer - OSBR" userId="67df0eea-3fa5-445e-8ba4-a52bfbd70c4f" providerId="ADAL" clId="{89BB2B61-977F-42D1-B630-E535B0144108}"/>
+    <pc:docChg chg="delSld modSld">
+      <pc:chgData name="Marco Bauer - OSBR" userId="67df0eea-3fa5-445e-8ba4-a52bfbd70c4f" providerId="ADAL" clId="{89BB2B61-977F-42D1-B630-E535B0144108}" dt="2024-09-23T22:36:54.129" v="1" actId="6549"/>
+      <pc:docMkLst>
+        <pc:docMk/>
+      </pc:docMkLst>
+      <pc:sldChg chg="del">
+        <pc:chgData name="Marco Bauer - OSBR" userId="67df0eea-3fa5-445e-8ba4-a52bfbd70c4f" providerId="ADAL" clId="{89BB2B61-977F-42D1-B630-E535B0144108}" dt="2024-09-23T22:36:50.083" v="0" actId="47"/>
+        <pc:sldMkLst>
+          <pc:docMk/>
+          <pc:sldMk cId="2753669573" sldId="256"/>
+        </pc:sldMkLst>
+      </pc:sldChg>
+      <pc:sldChg chg="modSp mod">
+        <pc:chgData name="Marco Bauer - OSBR" userId="67df0eea-3fa5-445e-8ba4-a52bfbd70c4f" providerId="ADAL" clId="{89BB2B61-977F-42D1-B630-E535B0144108}" dt="2024-09-23T22:36:54.129" v="1" actId="6549"/>
+        <pc:sldMkLst>
+          <pc:docMk/>
+          <pc:sldMk cId="1484108069" sldId="269"/>
+        </pc:sldMkLst>
+      </pc:sldChg>
+    </pc:docChg>
+  </pc:docChgLst>
   <pc:docChgLst>
     <pc:chgData name="Marco Bauer - OSBR" userId="67df0eea-3fa5-445e-8ba4-a52bfbd70c4f" providerId="ADAL" clId="{00A7E9DF-FE7E-47CE-A388-4EF3D89B6557}"/>
     <pc:docChg chg="undo redo custSel addSld delSld modSld sldOrd">
@@ -339,61 +394,6 @@
           </pc:sldLayoutMkLst>
         </pc:sldLayoutChg>
       </pc:sldMasterChg>
-    </pc:docChg>
-  </pc:docChgLst>
-  <pc:docChgLst>
-    <pc:chgData name="Marco Bauer - OSBR" userId="67df0eea-3fa5-445e-8ba4-a52bfbd70c4f" providerId="ADAL" clId="{89BB2B61-977F-42D1-B630-E535B0144108}"/>
-    <pc:docChg chg="delSld modSld">
-      <pc:chgData name="Marco Bauer - OSBR" userId="67df0eea-3fa5-445e-8ba4-a52bfbd70c4f" providerId="ADAL" clId="{89BB2B61-977F-42D1-B630-E535B0144108}" dt="2024-09-23T22:36:54.129" v="1" actId="6549"/>
-      <pc:docMkLst>
-        <pc:docMk/>
-      </pc:docMkLst>
-      <pc:sldChg chg="del">
-        <pc:chgData name="Marco Bauer - OSBR" userId="67df0eea-3fa5-445e-8ba4-a52bfbd70c4f" providerId="ADAL" clId="{89BB2B61-977F-42D1-B630-E535B0144108}" dt="2024-09-23T22:36:50.083" v="0" actId="47"/>
-        <pc:sldMkLst>
-          <pc:docMk/>
-          <pc:sldMk cId="2753669573" sldId="256"/>
-        </pc:sldMkLst>
-      </pc:sldChg>
-      <pc:sldChg chg="modSp mod">
-        <pc:chgData name="Marco Bauer - OSBR" userId="67df0eea-3fa5-445e-8ba4-a52bfbd70c4f" providerId="ADAL" clId="{89BB2B61-977F-42D1-B630-E535B0144108}" dt="2024-09-23T22:36:54.129" v="1" actId="6549"/>
-        <pc:sldMkLst>
-          <pc:docMk/>
-          <pc:sldMk cId="1484108069" sldId="269"/>
-        </pc:sldMkLst>
-      </pc:sldChg>
-    </pc:docChg>
-  </pc:docChgLst>
-  <pc:docChgLst>
-    <pc:chgData name="Marco Bauer - OSBR" userId="67df0eea-3fa5-445e-8ba4-a52bfbd70c4f" providerId="ADAL" clId="{D03E3FC4-E1EA-4DC7-B848-5BDFA8DE2D42}"/>
-    <pc:docChg chg="undo custSel modSld">
-      <pc:chgData name="Marco Bauer - OSBR" userId="67df0eea-3fa5-445e-8ba4-a52bfbd70c4f" providerId="ADAL" clId="{D03E3FC4-E1EA-4DC7-B848-5BDFA8DE2D42}" dt="2025-10-05T13:14:54.958" v="4" actId="1076"/>
-      <pc:docMkLst>
-        <pc:docMk/>
-      </pc:docMkLst>
-      <pc:sldChg chg="addSp delSp modSp mod">
-        <pc:chgData name="Marco Bauer - OSBR" userId="67df0eea-3fa5-445e-8ba4-a52bfbd70c4f" providerId="ADAL" clId="{D03E3FC4-E1EA-4DC7-B848-5BDFA8DE2D42}" dt="2025-10-05T13:14:54.958" v="4" actId="1076"/>
-        <pc:sldMkLst>
-          <pc:docMk/>
-          <pc:sldMk cId="1534718603" sldId="279"/>
-        </pc:sldMkLst>
-        <pc:picChg chg="add mod">
-          <ac:chgData name="Marco Bauer - OSBR" userId="67df0eea-3fa5-445e-8ba4-a52bfbd70c4f" providerId="ADAL" clId="{D03E3FC4-E1EA-4DC7-B848-5BDFA8DE2D42}" dt="2025-10-05T13:14:54.958" v="4" actId="1076"/>
-          <ac:picMkLst>
-            <pc:docMk/>
-            <pc:sldMk cId="1534718603" sldId="279"/>
-            <ac:picMk id="3" creationId="{89C33A75-C2D3-9FAA-D7A8-9D9C09B2B7A3}"/>
-          </ac:picMkLst>
-        </pc:picChg>
-        <pc:picChg chg="add del">
-          <ac:chgData name="Marco Bauer - OSBR" userId="67df0eea-3fa5-445e-8ba4-a52bfbd70c4f" providerId="ADAL" clId="{D03E3FC4-E1EA-4DC7-B848-5BDFA8DE2D42}" dt="2025-10-05T13:14:52.094" v="2" actId="478"/>
-          <ac:picMkLst>
-            <pc:docMk/>
-            <pc:sldMk cId="1534718603" sldId="279"/>
-            <ac:picMk id="6" creationId="{458D9D94-05E3-B95F-5EBF-D0B37EAFA458}"/>
-          </ac:picMkLst>
-        </pc:picChg>
-      </pc:sldChg>
     </pc:docChg>
   </pc:docChgLst>
 </pc:chgInfo>
@@ -3900,7 +3900,7 @@
           <a:p>
             <a:fld id="{A95A7694-39DD-48DE-827B-203BE6066A01}" type="datetimeFigureOut">
               <a:rPr lang="pt-BR" smtClean="0"/>
-              <a:t>08/12/2025</a:t>
+              <a:t>05/10/2025</a:t>
             </a:fld>
             <a:endParaRPr lang="pt-BR"/>
           </a:p>
@@ -4058,7 +4058,7 @@
           <a:p>
             <a:fld id="{31E5792E-2EF9-4C21-A82D-6A3CCA21BA12}" type="slidenum">
               <a:rPr lang="pt-BR" smtClean="0"/>
-              <a:t>‹nº›</a:t>
+              <a:t>‹#›</a:t>
             </a:fld>
             <a:endParaRPr lang="pt-BR"/>
           </a:p>
@@ -5799,7 +5799,7 @@
           <a:p>
             <a:fld id="{200154CF-EEF2-459C-A926-EE0FBFCB3EEE}" type="datetimeFigureOut">
               <a:rPr lang="pt-BR" smtClean="0"/>
-              <a:t>08/12/2025</a:t>
+              <a:t>05/10/2025</a:t>
             </a:fld>
             <a:endParaRPr lang="pt-BR"/>
           </a:p>
@@ -5853,7 +5853,7 @@
           <a:p>
             <a:fld id="{CD71F353-5ED6-4446-830C-09DEF0F01D14}" type="slidenum">
               <a:rPr lang="pt-BR" smtClean="0"/>
-              <a:t>‹nº›</a:t>
+              <a:t>‹#›</a:t>
             </a:fld>
             <a:endParaRPr lang="pt-BR"/>
           </a:p>
@@ -5997,7 +5997,7 @@
           <a:p>
             <a:fld id="{200154CF-EEF2-459C-A926-EE0FBFCB3EEE}" type="datetimeFigureOut">
               <a:rPr lang="pt-BR" smtClean="0"/>
-              <a:t>08/12/2025</a:t>
+              <a:t>05/10/2025</a:t>
             </a:fld>
             <a:endParaRPr lang="pt-BR"/>
           </a:p>
@@ -6051,7 +6051,7 @@
           <a:p>
             <a:fld id="{CD71F353-5ED6-4446-830C-09DEF0F01D14}" type="slidenum">
               <a:rPr lang="pt-BR" smtClean="0"/>
-              <a:t>‹nº›</a:t>
+              <a:t>‹#›</a:t>
             </a:fld>
             <a:endParaRPr lang="pt-BR"/>
           </a:p>
@@ -6205,7 +6205,7 @@
           <a:p>
             <a:fld id="{200154CF-EEF2-459C-A926-EE0FBFCB3EEE}" type="datetimeFigureOut">
               <a:rPr lang="pt-BR" smtClean="0"/>
-              <a:t>08/12/2025</a:t>
+              <a:t>05/10/2025</a:t>
             </a:fld>
             <a:endParaRPr lang="pt-BR"/>
           </a:p>
@@ -6259,7 +6259,7 @@
           <a:p>
             <a:fld id="{CD71F353-5ED6-4446-830C-09DEF0F01D14}" type="slidenum">
               <a:rPr lang="pt-BR" smtClean="0"/>
-              <a:t>‹nº›</a:t>
+              <a:t>‹#›</a:t>
             </a:fld>
             <a:endParaRPr lang="pt-BR"/>
           </a:p>
@@ -6403,7 +6403,7 @@
           <a:p>
             <a:fld id="{200154CF-EEF2-459C-A926-EE0FBFCB3EEE}" type="datetimeFigureOut">
               <a:rPr lang="pt-BR" smtClean="0"/>
-              <a:t>08/12/2025</a:t>
+              <a:t>05/10/2025</a:t>
             </a:fld>
             <a:endParaRPr lang="pt-BR"/>
           </a:p>
@@ -6457,7 +6457,7 @@
           <a:p>
             <a:fld id="{CD71F353-5ED6-4446-830C-09DEF0F01D14}" type="slidenum">
               <a:rPr lang="pt-BR" smtClean="0"/>
-              <a:t>‹nº›</a:t>
+              <a:t>‹#›</a:t>
             </a:fld>
             <a:endParaRPr lang="pt-BR"/>
           </a:p>
@@ -6678,7 +6678,7 @@
           <a:p>
             <a:fld id="{200154CF-EEF2-459C-A926-EE0FBFCB3EEE}" type="datetimeFigureOut">
               <a:rPr lang="pt-BR" smtClean="0"/>
-              <a:t>08/12/2025</a:t>
+              <a:t>05/10/2025</a:t>
             </a:fld>
             <a:endParaRPr lang="pt-BR"/>
           </a:p>
@@ -6732,7 +6732,7 @@
           <a:p>
             <a:fld id="{CD71F353-5ED6-4446-830C-09DEF0F01D14}" type="slidenum">
               <a:rPr lang="pt-BR" smtClean="0"/>
-              <a:t>‹nº›</a:t>
+              <a:t>‹#›</a:t>
             </a:fld>
             <a:endParaRPr lang="pt-BR"/>
           </a:p>
@@ -6943,7 +6943,7 @@
           <a:p>
             <a:fld id="{200154CF-EEF2-459C-A926-EE0FBFCB3EEE}" type="datetimeFigureOut">
               <a:rPr lang="pt-BR" smtClean="0"/>
-              <a:t>08/12/2025</a:t>
+              <a:t>05/10/2025</a:t>
             </a:fld>
             <a:endParaRPr lang="pt-BR"/>
           </a:p>
@@ -6997,7 +6997,7 @@
           <a:p>
             <a:fld id="{CD71F353-5ED6-4446-830C-09DEF0F01D14}" type="slidenum">
               <a:rPr lang="pt-BR" smtClean="0"/>
-              <a:t>‹nº›</a:t>
+              <a:t>‹#›</a:t>
             </a:fld>
             <a:endParaRPr lang="pt-BR"/>
           </a:p>
@@ -7355,7 +7355,7 @@
           <a:p>
             <a:fld id="{200154CF-EEF2-459C-A926-EE0FBFCB3EEE}" type="datetimeFigureOut">
               <a:rPr lang="pt-BR" smtClean="0"/>
-              <a:t>08/12/2025</a:t>
+              <a:t>05/10/2025</a:t>
             </a:fld>
             <a:endParaRPr lang="pt-BR"/>
           </a:p>
@@ -7409,7 +7409,7 @@
           <a:p>
             <a:fld id="{CD71F353-5ED6-4446-830C-09DEF0F01D14}" type="slidenum">
               <a:rPr lang="pt-BR" smtClean="0"/>
-              <a:t>‹nº›</a:t>
+              <a:t>‹#›</a:t>
             </a:fld>
             <a:endParaRPr lang="pt-BR"/>
           </a:p>
@@ -7496,7 +7496,7 @@
           <a:p>
             <a:fld id="{200154CF-EEF2-459C-A926-EE0FBFCB3EEE}" type="datetimeFigureOut">
               <a:rPr lang="pt-BR" smtClean="0"/>
-              <a:t>08/12/2025</a:t>
+              <a:t>05/10/2025</a:t>
             </a:fld>
             <a:endParaRPr lang="pt-BR"/>
           </a:p>
@@ -7550,7 +7550,7 @@
           <a:p>
             <a:fld id="{CD71F353-5ED6-4446-830C-09DEF0F01D14}" type="slidenum">
               <a:rPr lang="pt-BR" smtClean="0"/>
-              <a:t>‹nº›</a:t>
+              <a:t>‹#›</a:t>
             </a:fld>
             <a:endParaRPr lang="pt-BR"/>
           </a:p>
@@ -7609,7 +7609,7 @@
           <a:p>
             <a:fld id="{200154CF-EEF2-459C-A926-EE0FBFCB3EEE}" type="datetimeFigureOut">
               <a:rPr lang="pt-BR" smtClean="0"/>
-              <a:t>08/12/2025</a:t>
+              <a:t>05/10/2025</a:t>
             </a:fld>
             <a:endParaRPr lang="pt-BR"/>
           </a:p>
@@ -7663,7 +7663,7 @@
           <a:p>
             <a:fld id="{CD71F353-5ED6-4446-830C-09DEF0F01D14}" type="slidenum">
               <a:rPr lang="pt-BR" smtClean="0"/>
-              <a:t>‹nº›</a:t>
+              <a:t>‹#›</a:t>
             </a:fld>
             <a:endParaRPr lang="pt-BR"/>
           </a:p>
@@ -7920,7 +7920,7 @@
           <a:p>
             <a:fld id="{200154CF-EEF2-459C-A926-EE0FBFCB3EEE}" type="datetimeFigureOut">
               <a:rPr lang="pt-BR" smtClean="0"/>
-              <a:t>08/12/2025</a:t>
+              <a:t>05/10/2025</a:t>
             </a:fld>
             <a:endParaRPr lang="pt-BR"/>
           </a:p>
@@ -7974,7 +7974,7 @@
           <a:p>
             <a:fld id="{CD71F353-5ED6-4446-830C-09DEF0F01D14}" type="slidenum">
               <a:rPr lang="pt-BR" smtClean="0"/>
-              <a:t>‹nº›</a:t>
+              <a:t>‹#›</a:t>
             </a:fld>
             <a:endParaRPr lang="pt-BR"/>
           </a:p>
@@ -8208,7 +8208,7 @@
           <a:p>
             <a:fld id="{200154CF-EEF2-459C-A926-EE0FBFCB3EEE}" type="datetimeFigureOut">
               <a:rPr lang="pt-BR" smtClean="0"/>
-              <a:t>08/12/2025</a:t>
+              <a:t>05/10/2025</a:t>
             </a:fld>
             <a:endParaRPr lang="pt-BR"/>
           </a:p>
@@ -8262,7 +8262,7 @@
           <a:p>
             <a:fld id="{CD71F353-5ED6-4446-830C-09DEF0F01D14}" type="slidenum">
               <a:rPr lang="pt-BR" smtClean="0"/>
-              <a:t>‹nº›</a:t>
+              <a:t>‹#›</a:t>
             </a:fld>
             <a:endParaRPr lang="pt-BR"/>
           </a:p>
@@ -8449,7 +8449,7 @@
           <a:p>
             <a:fld id="{200154CF-EEF2-459C-A926-EE0FBFCB3EEE}" type="datetimeFigureOut">
               <a:rPr lang="pt-BR" smtClean="0"/>
-              <a:t>08/12/2025</a:t>
+              <a:t>05/10/2025</a:t>
             </a:fld>
             <a:endParaRPr lang="pt-BR"/>
           </a:p>
@@ -8539,7 +8539,7 @@
           <a:p>
             <a:fld id="{CD71F353-5ED6-4446-830C-09DEF0F01D14}" type="slidenum">
               <a:rPr lang="pt-BR" smtClean="0"/>
-              <a:t>‹nº›</a:t>
+              <a:t>‹#›</a:t>
             </a:fld>
             <a:endParaRPr lang="pt-BR"/>
           </a:p>
@@ -14794,29 +14794,7 @@
                 <a:ea typeface="Roboto" pitchFamily="2" charset="0"/>
                 <a:cs typeface="Poppins" panose="00000500000000000000" pitchFamily="2" charset="0"/>
               </a:rPr>
-              <a:t>     Treinamento </a:t>
-            </a:r>
-            <a:r>
-              <a:rPr lang="pt-BR">
-                <a:solidFill>
-                  <a:schemeClr val="bg1"/>
-                </a:solidFill>
-                <a:latin typeface="Poppins" panose="00000500000000000000" pitchFamily="2" charset="0"/>
-                <a:ea typeface="Roboto" pitchFamily="2" charset="0"/>
-                <a:cs typeface="Poppins" panose="00000500000000000000" pitchFamily="2" charset="0"/>
-              </a:rPr>
-              <a:t>de 40 </a:t>
-            </a:r>
-            <a:r>
-              <a:rPr lang="pt-BR" dirty="0">
-                <a:solidFill>
-                  <a:schemeClr val="bg1"/>
-                </a:solidFill>
-                <a:latin typeface="Poppins" panose="00000500000000000000" pitchFamily="2" charset="0"/>
-                <a:ea typeface="Roboto" pitchFamily="2" charset="0"/>
-                <a:cs typeface="Poppins" panose="00000500000000000000" pitchFamily="2" charset="0"/>
-              </a:rPr>
-              <a:t>horas</a:t>
+              <a:t>     Treinamento de 32 horas</a:t>
             </a:r>
           </a:p>
           <a:p>
@@ -15611,6 +15589,26 @@
 </file>
 
 <file path=customXml/item1.xml><?xml version="1.0" encoding="utf-8"?>
+<p:properties xmlns:p="http://schemas.microsoft.com/office/2006/metadata/properties" xmlns:xsi="http://www.w3.org/2001/XMLSchema-instance" xmlns:pc="http://schemas.microsoft.com/office/infopath/2007/PartnerControls">
+  <documentManagement>
+    <TaxCatchAll xmlns="9a808e08-7272-42ca-9b4c-a74e09b0422f" xsi:nil="true"/>
+    <lcf76f155ced4ddcb4097134ff3c332f xmlns="9e71b6e9-7397-4d68-bcf0-db217f73c314">
+      <Terms xmlns="http://schemas.microsoft.com/office/infopath/2007/PartnerControls"/>
+    </lcf76f155ced4ddcb4097134ff3c332f>
+  </documentManagement>
+</p:properties>
+</file>
+
+<file path=customXml/item2.xml><?xml version="1.0" encoding="utf-8"?>
+<?mso-contentType ?>
+<FormTemplates xmlns="http://schemas.microsoft.com/sharepoint/v3/contenttype/forms">
+  <Display>DocumentLibraryForm</Display>
+  <Edit>DocumentLibraryForm</Edit>
+  <New>DocumentLibraryForm</New>
+</FormTemplates>
+</file>
+
+<file path=customXml/item3.xml><?xml version="1.0" encoding="utf-8"?>
 <ct:contentTypeSchema xmlns:ct="http://schemas.microsoft.com/office/2006/metadata/contentType" xmlns:ma="http://schemas.microsoft.com/office/2006/metadata/properties/metaAttributes" ct:_="" ma:_="" ma:contentTypeName="Documento" ma:contentTypeID="0x0101003C7A8ABCB955F2489A6B45895CC5EC05" ma:contentTypeVersion="15" ma:contentTypeDescription="Crie um novo documento." ma:contentTypeScope="" ma:versionID="b936ee4024ea3595373f9ff2a61035cd">
   <xsd:schema xmlns:xsd="http://www.w3.org/2001/XMLSchema" xmlns:xs="http://www.w3.org/2001/XMLSchema" xmlns:p="http://schemas.microsoft.com/office/2006/metadata/properties" xmlns:ns2="9e71b6e9-7397-4d68-bcf0-db217f73c314" xmlns:ns3="9a808e08-7272-42ca-9b4c-a74e09b0422f" targetNamespace="http://schemas.microsoft.com/office/2006/metadata/properties" ma:root="true" ma:fieldsID="3057654fd4a47e8eb7435265d746d175" ns2:_="" ns3:_="">
     <xsd:import namespace="9e71b6e9-7397-4d68-bcf0-db217f73c314"/>
@@ -15845,27 +15843,26 @@
 </ct:contentTypeSchema>
 </file>
 
-<file path=customXml/item2.xml><?xml version="1.0" encoding="utf-8"?>
-<?mso-contentType ?>
-<FormTemplates xmlns="http://schemas.microsoft.com/sharepoint/v3/contenttype/forms">
-  <Display>DocumentLibraryForm</Display>
-  <Edit>DocumentLibraryForm</Edit>
-  <New>DocumentLibraryForm</New>
-</FormTemplates>
+<file path=customXml/itemProps1.xml><?xml version="1.0" encoding="utf-8"?>
+<ds:datastoreItem xmlns:ds="http://schemas.openxmlformats.org/officeDocument/2006/customXml" ds:itemID="{AC38BB02-D7FB-49BB-857F-E42DE45C8706}">
+  <ds:schemaRefs>
+    <ds:schemaRef ds:uri="http://schemas.microsoft.com/office/2006/metadata/properties"/>
+    <ds:schemaRef ds:uri="http://schemas.microsoft.com/office/infopath/2007/PartnerControls"/>
+    <ds:schemaRef ds:uri="9a808e08-7272-42ca-9b4c-a74e09b0422f"/>
+    <ds:schemaRef ds:uri="9e71b6e9-7397-4d68-bcf0-db217f73c314"/>
+  </ds:schemaRefs>
+</ds:datastoreItem>
 </file>
 
-<file path=customXml/item3.xml><?xml version="1.0" encoding="utf-8"?>
-<p:properties xmlns:p="http://schemas.microsoft.com/office/2006/metadata/properties" xmlns:xsi="http://www.w3.org/2001/XMLSchema-instance" xmlns:pc="http://schemas.microsoft.com/office/infopath/2007/PartnerControls">
-  <documentManagement>
-    <TaxCatchAll xmlns="9a808e08-7272-42ca-9b4c-a74e09b0422f" xsi:nil="true"/>
-    <lcf76f155ced4ddcb4097134ff3c332f xmlns="9e71b6e9-7397-4d68-bcf0-db217f73c314">
-      <Terms xmlns="http://schemas.microsoft.com/office/infopath/2007/PartnerControls"/>
-    </lcf76f155ced4ddcb4097134ff3c332f>
-  </documentManagement>
-</p:properties>
+<file path=customXml/itemProps2.xml><?xml version="1.0" encoding="utf-8"?>
+<ds:datastoreItem xmlns:ds="http://schemas.openxmlformats.org/officeDocument/2006/customXml" ds:itemID="{04273E09-138F-421C-B6FB-3E24F5190C52}">
+  <ds:schemaRefs>
+    <ds:schemaRef ds:uri="http://schemas.microsoft.com/sharepoint/v3/contenttype/forms"/>
+  </ds:schemaRefs>
+</ds:datastoreItem>
 </file>
 
-<file path=customXml/itemProps1.xml><?xml version="1.0" encoding="utf-8"?>
+<file path=customXml/itemProps3.xml><?xml version="1.0" encoding="utf-8"?>
 <ds:datastoreItem xmlns:ds="http://schemas.openxmlformats.org/officeDocument/2006/customXml" ds:itemID="{75750D0A-4F79-45AB-AD31-C3D9BC9442C3}">
   <ds:schemaRefs>
     <ds:schemaRef ds:uri="http://schemas.microsoft.com/office/2006/metadata/contentType"/>
@@ -15882,23 +15879,4 @@
     <ds:schemaRef ds:uri="http://schemas.microsoft.com/internal/obd"/>
   </ds:schemaRefs>
 </ds:datastoreItem>
-</file>
-
-<file path=customXml/itemProps2.xml><?xml version="1.0" encoding="utf-8"?>
-<ds:datastoreItem xmlns:ds="http://schemas.openxmlformats.org/officeDocument/2006/customXml" ds:itemID="{04273E09-138F-421C-B6FB-3E24F5190C52}">
-  <ds:schemaRefs>
-    <ds:schemaRef ds:uri="http://schemas.microsoft.com/sharepoint/v3/contenttype/forms"/>
-  </ds:schemaRefs>
-</ds:datastoreItem>
-</file>
-
-<file path=customXml/itemProps3.xml><?xml version="1.0" encoding="utf-8"?>
-<ds:datastoreItem xmlns:ds="http://schemas.openxmlformats.org/officeDocument/2006/customXml" ds:itemID="{AC38BB02-D7FB-49BB-857F-E42DE45C8706}">
-  <ds:schemaRefs>
-    <ds:schemaRef ds:uri="http://schemas.microsoft.com/office/2006/metadata/properties"/>
-    <ds:schemaRef ds:uri="http://schemas.microsoft.com/office/infopath/2007/PartnerControls"/>
-    <ds:schemaRef ds:uri="9a808e08-7272-42ca-9b4c-a74e09b0422f"/>
-    <ds:schemaRef ds:uri="9e71b6e9-7397-4d68-bcf0-db217f73c314"/>
-  </ds:schemaRefs>
-</ds:datastoreItem>
 </file>